--- a/courseware/xLab-cs201.pptx
+++ b/courseware/xLab-cs201.pptx
@@ -12045,7 +12045,7 @@
                 <a:ea typeface="Microsoft YaHei"/>
                 <a:cs typeface="Microsoft YaHei"/>
               </a:rPr>
-              <a:t>计算概论B</a:t>
+              <a:t>数据结构与算法A</a:t>
             </a:r>
             <a:r>
               <a:rPr sz="2100" b="0" dirty="0">
